--- a/dist/초2/철학·논리·심리·교육·종교/이유와다른생각/초2_철학·논리·심리·교육·종교_이유와다른생각_01_서로다른이유_학생용.pptx
+++ b/dist/초2/철학·논리·심리·교육·종교/이유와다른생각/초2_철학·논리·심리·교육·종교_이유와다른생각_01_서로다른이유_학생용.pptx
@@ -118,44 +118,44 @@
   <p:extLst>
     <p:ext uri="{521415D9-36F7-43E2-AB2F-B90AF26B5E84}">
       <p14:sectionLst xmlns:p14="http://schemas.microsoft.com/office/powerpoint/2010/main">
-        <p14:section name="도입" id="{418d1a7e-1d00-a4d3-530e-3704f78d1909}">
+        <p14:section name="도입" id="{433e35c5-685f-46d7-ee98-cb934476b0ba}">
           <p14:sldIdLst>
             <p14:sldId id="256"/>
             <p14:sldId id="257"/>
           </p14:sldIdLst>
         </p14:section>
-        <p14:section name="개념" id="{d75767fb-6a0e-9d6d-9156-8b8eb1966391}">
+        <p14:section name="개념" id="{22b30a8f-0e79-f677-96a4-f9c4463649a4}">
           <p14:sldIdLst>
             <p14:sldId id="258"/>
             <p14:sldId id="259"/>
             <p14:sldId id="261"/>
           </p14:sldIdLst>
         </p14:section>
-        <p14:section name="연습" id="{0224bb5a-062e-d9eb-7db2-9f89f47f7c64}">
+        <p14:section name="연습" id="{250acee8-76dd-ba1a-98d5-f09a34e391aa}">
           <p14:sldIdLst>
             <p14:sldId id="260"/>
             <p14:sldId id="262"/>
             <p14:sldId id="263"/>
           </p14:sldIdLst>
         </p14:section>
-        <p14:section name="개념" id="{a71027fc-7eae-aa25-af49-32dc8b37e8c5}">
+        <p14:section name="개념" id="{9ac8da32-2afd-8166-16a3-8931d94e4805}">
           <p14:sldIdLst/>
         </p14:section>
-        <p14:section name="연습" id="{2c01d6c2-befe-7411-47f5-4cfcd9f0ba08}">
+        <p14:section name="연습" id="{b4f3213b-88fa-4af6-2f1f-b7dab6d5ad00}">
           <p14:sldIdLst/>
         </p14:section>
-        <p14:section name="확인" id="{1e3c05eb-e2b2-e45e-07af-d27a4a40c944}">
+        <p14:section name="확인" id="{b9212336-0334-839e-6c69-78e1ea0bbc65}">
           <p14:sldIdLst>
             <p14:sldId id="264"/>
             <p14:sldId id="265"/>
           </p14:sldIdLst>
         </p14:section>
-        <p14:section name="정리" id="{95f09e9b-17af-d956-e6fd-a34c01af94e7}">
+        <p14:section name="정리" id="{acbf12e7-267f-29da-259d-b020ad046990}">
           <p14:sldIdLst>
             <p14:sldId id="266"/>
           </p14:sldIdLst>
         </p14:section>
-        <p14:section name="보충" id="{8ad4e66f-e577-8132-0485-b976df59b1f3}">
+        <p14:section name="보충" id="{33ccc71c-ce8a-e7d0-c911-17223c2f3193}">
           <p14:sldIdLst>
             <p14:sldId id="267"/>
           </p14:sldIdLst>
